--- a/classes/parte-0-fundamentos-y-prerrequisitos/001-que-es-la-ciberseguridad-triada-cia-aaa-superficie-de-ataque-y-defensa-en-profundidad/clase-001-presentacion.pptx
+++ b/classes/parte-0-fundamentos-y-prerrequisitos/001-que-es-la-ciberseguridad-triada-cia-aaa-superficie-de-ataque-y-defensa-en-profundidad/clase-001-presentacion.pptx
@@ -17,6 +17,10 @@
     <p:sldId id="265" r:id="rId16"/>
     <p:sldId id="266" r:id="rId17"/>
     <p:sldId id="267" r:id="rId18"/>
+    <p:sldId id="268" r:id="rId19"/>
+    <p:sldId id="269" r:id="rId20"/>
+    <p:sldId id="270" r:id="rId21"/>
+    <p:sldId id="271" r:id="rId22"/>
   </p:sldIdLst>
   <p:sldSz cx="9144000" cy="6858000" type="screen4x3"/>
   <p:notesSz cx="6858000" cy="9144000"/>
@@ -3198,7 +3202,7 @@
                   <a:srgbClr val="0B3D2E"/>
                 </a:solidFill>
               </a:rPr>
-              <a:t>⚠️ Errores comunes</a:t>
+              <a:t>✍️ Ejercicios</a:t>
             </a:r>
           </a:p>
         </p:txBody>
@@ -3236,67 +3240,97 @@
                   <a:srgbClr val="22282E"/>
                 </a:solidFill>
               </a:rPr>
-              <a:t>•  Confundir autenticación con autorización — Autenticar = ¿quién eres?; autorizar = ¿qué puedes hacer?. Recuerda el orden: primero autenticas, luego autorizas.</a:t>
-            </a:r>
-          </a:p>
-          <a:p>
-            <a:pPr>
-              <a:spcAft>
-                <a:spcPts val="600"/>
-              </a:spcAft>
-            </a:pPr>
-            <a:r>
-              <a:rPr sz="1500">
-                <a:solidFill>
-                  <a:srgbClr val="22282E"/>
-                </a:solidFill>
-              </a:rPr>
-              <a:t>•  Tratar disponibilidad como algo "de infraestructura" y no de seguridad — Un DoS es un ataque de seguridad; la A de CIA es tan importante como las otras dos.</a:t>
-            </a:r>
-          </a:p>
-          <a:p>
-            <a:pPr>
-              <a:spcAft>
-                <a:spcPts val="600"/>
-              </a:spcAft>
-            </a:pPr>
-            <a:r>
-              <a:rPr sz="1500">
-                <a:solidFill>
-                  <a:srgbClr val="22282E"/>
-                </a:solidFill>
-              </a:rPr>
-              <a:t>•  Creer que cifrar lo resuelve todo — El cifrado protege confidencialidad, no integridad ni disponibilidad; hacen falta firmas y redundancia.</a:t>
-            </a:r>
-          </a:p>
-          <a:p>
-            <a:pPr>
-              <a:spcAft>
-                <a:spcPts val="600"/>
-              </a:spcAft>
-            </a:pPr>
-            <a:r>
-              <a:rPr sz="1500">
-                <a:solidFill>
-                  <a:srgbClr val="22282E"/>
-                </a:solidFill>
-              </a:rPr>
-              <a:t>•  Confundir riesgo con vulnerabilidad — Riesgo = probabilidad × impacto sobre un activo; la vulnerabilidad es solo un ingrediente.</a:t>
-            </a:r>
-          </a:p>
-          <a:p>
-            <a:pPr>
-              <a:spcAft>
-                <a:spcPts val="600"/>
-              </a:spcAft>
-            </a:pPr>
-            <a:r>
-              <a:rPr sz="1500">
-                <a:solidFill>
-                  <a:srgbClr val="22282E"/>
-                </a:solidFill>
-              </a:rPr>
-              <a:t>•  Diseñar una sola línea de defensa "perfecta" — Asume que fallará; por eso se apilan capas.</a:t>
+              <a:t>•  Clasifica estos incidentes según qué propiedad CIA violan principalmente: ransomware, defacement de una web, robo de una base de datos, ataque de amplificación DNS.</a:t>
+            </a:r>
+          </a:p>
+          <a:p>
+            <a:pPr>
+              <a:spcAft>
+                <a:spcPts val="600"/>
+              </a:spcAft>
+            </a:pPr>
+            <a:r>
+              <a:rPr sz="1500">
+                <a:solidFill>
+                  <a:srgbClr val="22282E"/>
+                </a:solidFill>
+              </a:rPr>
+              <a:t>•  Explica con un ejemplo propio la diferencia entre amenaza, vulnerabilidad y riesgo, y calcula informalmente el riesgo de un caso.</a:t>
+            </a:r>
+          </a:p>
+          <a:p>
+            <a:pPr>
+              <a:spcAft>
+                <a:spcPts val="600"/>
+              </a:spcAft>
+            </a:pPr>
+            <a:r>
+              <a:rPr sz="1500">
+                <a:solidFill>
+                  <a:srgbClr val="22282E"/>
+                </a:solidFill>
+              </a:rPr>
+              <a:t>•  Diseña un esquema AAA para una app bancaria: ¿qué factores de autenticación y qué niveles de autorización usarías, y qué eventos registrarías?</a:t>
+            </a:r>
+          </a:p>
+          <a:p>
+            <a:pPr>
+              <a:spcAft>
+                <a:spcPts val="600"/>
+              </a:spcAft>
+            </a:pPr>
+            <a:r>
+              <a:rPr sz="1500">
+                <a:solidFill>
+                  <a:srgbClr val="22282E"/>
+                </a:solidFill>
+              </a:rPr>
+              <a:t>•  Toma un dispositivo IoT doméstico y enumera su superficie de ataque completa, separando la parte de red, la de aplicación y la humana.</a:t>
+            </a:r>
+          </a:p>
+          <a:p>
+            <a:pPr>
+              <a:spcAft>
+                <a:spcPts val="600"/>
+              </a:spcAft>
+            </a:pPr>
+            <a:r>
+              <a:rPr sz="1500">
+                <a:solidFill>
+                  <a:srgbClr val="22282E"/>
+                </a:solidFill>
+              </a:rPr>
+              <a:t>•  Un servidor tiene un único control: un firewall perimetral. Argumenta por qué es insuficiente y propón tres capas adicionales con su función.</a:t>
+            </a:r>
+          </a:p>
+          <a:p>
+            <a:pPr>
+              <a:spcAft>
+                <a:spcPts val="600"/>
+              </a:spcAft>
+            </a:pPr>
+            <a:r>
+              <a:rPr sz="1500">
+                <a:solidFill>
+                  <a:srgbClr val="22282E"/>
+                </a:solidFill>
+              </a:rPr>
+              <a:t>•  Explica cómo una firma digital aporta a la vez integridad, autenticidad y no repudio, y cuál de las tres no cubre por sí sola.</a:t>
+            </a:r>
+          </a:p>
+          <a:p>
+            <a:pPr>
+              <a:spcAft>
+                <a:spcPts val="600"/>
+              </a:spcAft>
+            </a:pPr>
+            <a:r>
+              <a:rPr sz="1500">
+                <a:solidFill>
+                  <a:srgbClr val="22282E"/>
+                </a:solidFill>
+              </a:rPr>
+              <a:t>•  Investiga y resume en cinco líneas qué cambia el modelo zero trust respecto al perímetro clásico y qué problema concreto resuelve.</a:t>
             </a:r>
           </a:p>
         </p:txBody>
@@ -3347,7 +3381,7 @@
                   <a:srgbClr val="0B3D2E"/>
                 </a:solidFill>
               </a:rPr>
-              <a:t>❓ Preguntas frecuentes</a:t>
+              <a:t>📝 Reto verificable</a:t>
             </a:r>
           </a:p>
         </p:txBody>
@@ -3385,52 +3419,22 @@
                   <a:srgbClr val="22282E"/>
                 </a:solidFill>
               </a:rPr>
-              <a:t>•  ❓ ¿La tríada CIA está desactualizada? No, sigue siendo el marco base. Se ha extendido con autenticidad, no repudio y trazabilidad (modelos como Parkerian Hexad), pero CIA sigue siendo el punto de partida obligatorio.</a:t>
-            </a:r>
-          </a:p>
-          <a:p>
-            <a:pPr>
-              <a:spcAft>
-                <a:spcPts val="600"/>
-              </a:spcAft>
-            </a:pPr>
-            <a:r>
-              <a:rPr sz="1500">
-                <a:solidFill>
-                  <a:srgbClr val="22282E"/>
-                </a:solidFill>
-              </a:rPr>
-              <a:t>•  ❓ ¿AAA es lo mismo que MFA? No. AAA es el modelo completo (autenticación, autorización, accounting). MFA es solo una forma de reforzar la primera A usando varios factores.</a:t>
-            </a:r>
-          </a:p>
-          <a:p>
-            <a:pPr>
-              <a:spcAft>
-                <a:spcPts val="600"/>
-              </a:spcAft>
-            </a:pPr>
-            <a:r>
-              <a:rPr sz="1500">
-                <a:solidFill>
-                  <a:srgbClr val="22282E"/>
-                </a:solidFill>
-              </a:rPr>
-              <a:t>•  ❓ ¿Reducir la superficie de ataque no limita la funcionalidad? A veces sí, y ahí está el equilibrio: se desactiva lo que no se usa. Un servicio apagado no tiene vulnerabilidades explotables.</a:t>
-            </a:r>
-          </a:p>
-          <a:p>
-            <a:pPr>
-              <a:spcAft>
-                <a:spcPts val="600"/>
-              </a:spcAft>
-            </a:pPr>
-            <a:r>
-              <a:rPr sz="1500">
-                <a:solidFill>
-                  <a:srgbClr val="22282E"/>
-                </a:solidFill>
-              </a:rPr>
-              <a:t>•  ❓ ¿Zero trust reemplaza la defensa en profundidad? No, la complementa: zero trust elimina la confianza implícita por ubicación de red, pero sigue apilando controles en capas.</a:t>
+              <a:t>•  Redacta una ficha de una página para un activo de tu elección que contenga: (1) su clasificación CIA con justificación de la prioridad, (2) su matriz AAA con factores y permisos, (3) su mapa de…</a:t>
+            </a:r>
+          </a:p>
+          <a:p>
+            <a:pPr>
+              <a:spcAft>
+                <a:spcPts val="600"/>
+              </a:spcAft>
+            </a:pPr>
+            <a:r>
+              <a:rPr sz="1500">
+                <a:solidFill>
+                  <a:srgbClr val="22282E"/>
+                </a:solidFill>
+              </a:rPr>
+              <a:t>•  Criterio de aceptación: la ficha vincula cada punto de la superficie de ataque a al menos un control, y cada control queda asignado a una capa de la defensa en profundidad. Un revisor debe poder…</a:t>
             </a:r>
           </a:p>
         </p:txBody>
@@ -3481,7 +3485,7 @@
                   <a:srgbClr val="0B3D2E"/>
                 </a:solidFill>
               </a:rPr>
-              <a:t>🔗 Referencias</a:t>
+              <a:t>⚠️ Errores comunes</a:t>
             </a:r>
           </a:p>
         </p:txBody>
@@ -3519,6 +3523,319 @@
                   <a:srgbClr val="22282E"/>
                 </a:solidFill>
               </a:rPr>
+              <a:t>•  Confundir autenticación con autorización — Autenticar = ¿quién eres?; autorizar = ¿qué puedes hacer?. Recuerda el orden: primero autenticas, luego autorizas.</a:t>
+            </a:r>
+          </a:p>
+          <a:p>
+            <a:pPr>
+              <a:spcAft>
+                <a:spcPts val="600"/>
+              </a:spcAft>
+            </a:pPr>
+            <a:r>
+              <a:rPr sz="1500">
+                <a:solidFill>
+                  <a:srgbClr val="22282E"/>
+                </a:solidFill>
+              </a:rPr>
+              <a:t>•  Tratar la disponibilidad como algo "de infraestructura" y no de seguridad — Un DoS es un ataque de seguridad; la A de CIA es tan importante como las otras dos.</a:t>
+            </a:r>
+          </a:p>
+          <a:p>
+            <a:pPr>
+              <a:spcAft>
+                <a:spcPts val="600"/>
+              </a:spcAft>
+            </a:pPr>
+            <a:r>
+              <a:rPr sz="1500">
+                <a:solidFill>
+                  <a:srgbClr val="22282E"/>
+                </a:solidFill>
+              </a:rPr>
+              <a:t>•  Creer que cifrar lo resuelve todo — El cifrado protege la confidencialidad, no la integridad ni la disponibilidad; hacen falta firmas, hashes y redundancia.</a:t>
+            </a:r>
+          </a:p>
+          <a:p>
+            <a:pPr>
+              <a:spcAft>
+                <a:spcPts val="600"/>
+              </a:spcAft>
+            </a:pPr>
+            <a:r>
+              <a:rPr sz="1500">
+                <a:solidFill>
+                  <a:srgbClr val="22282E"/>
+                </a:solidFill>
+              </a:rPr>
+              <a:t>•  Confundir riesgo con vulnerabilidad — Riesgo ≈ probabilidad × impacto sobre un activo; la vulnerabilidad es solo un ingrediente.</a:t>
+            </a:r>
+          </a:p>
+          <a:p>
+            <a:pPr>
+              <a:spcAft>
+                <a:spcPts val="600"/>
+              </a:spcAft>
+            </a:pPr>
+            <a:r>
+              <a:rPr sz="1500">
+                <a:solidFill>
+                  <a:srgbClr val="22282E"/>
+                </a:solidFill>
+              </a:rPr>
+              <a:t>•  Diseñar una sola línea de defensa "perfecta" — Asume que fallará; por eso se apilan capas y se aplica mínimo privilegio.</a:t>
+            </a:r>
+          </a:p>
+          <a:p>
+            <a:pPr>
+              <a:spcAft>
+                <a:spcPts val="600"/>
+              </a:spcAft>
+            </a:pPr>
+            <a:r>
+              <a:rPr sz="1500">
+                <a:solidFill>
+                  <a:srgbClr val="22282E"/>
+                </a:solidFill>
+              </a:rPr>
+              <a:t>•  Creer que zero trust significa "no confiar en nadie" y basta con eso — Zero trust elimina la confianza implícita por red, pero sigue exigiendo capas y verificación continua.</a:t>
+            </a:r>
+          </a:p>
+        </p:txBody>
+      </p:sp>
+    </p:spTree>
+  </p:cSld>
+  <p:clrMapOvr>
+    <a:masterClrMapping/>
+  </p:clrMapOvr>
+</p:sld>
+</file>
+
+<file path=ppt/slides/slide13.xml><?xml version="1.0" encoding="utf-8"?>
+<p:sld xmlns:a="http://schemas.openxmlformats.org/drawingml/2006/main" xmlns:p="http://schemas.openxmlformats.org/presentationml/2006/main" xmlns:r="http://schemas.openxmlformats.org/officeDocument/2006/relationships">
+  <p:cSld>
+    <p:spTree>
+      <p:nvGrpSpPr>
+        <p:cNvPr id="1" name=""/>
+        <p:cNvGrpSpPr/>
+        <p:nvPr/>
+      </p:nvGrpSpPr>
+      <p:grpSpPr/>
+      <p:sp>
+        <p:nvSpPr>
+          <p:cNvPr id="2" name="TextBox 1"/>
+          <p:cNvSpPr txBox="1"/>
+          <p:nvPr/>
+        </p:nvSpPr>
+        <p:spPr>
+          <a:xfrm>
+            <a:off x="457200" y="320040"/>
+            <a:ext cx="8229600" cy="822960"/>
+          </a:xfrm>
+          <a:prstGeom prst="rect">
+            <a:avLst/>
+          </a:prstGeom>
+          <a:noFill/>
+        </p:spPr>
+        <p:txBody>
+          <a:bodyPr wrap="square">
+            <a:spAutoFit/>
+          </a:bodyPr>
+          <a:lstStyle/>
+          <a:p>
+            <a:r>
+              <a:rPr sz="2600" b="1">
+                <a:solidFill>
+                  <a:srgbClr val="0B3D2E"/>
+                </a:solidFill>
+              </a:rPr>
+              <a:t>❓ Preguntas frecuentes</a:t>
+            </a:r>
+          </a:p>
+        </p:txBody>
+      </p:sp>
+      <p:sp>
+        <p:nvSpPr>
+          <p:cNvPr id="3" name="TextBox 2"/>
+          <p:cNvSpPr txBox="1"/>
+          <p:nvPr/>
+        </p:nvSpPr>
+        <p:spPr>
+          <a:xfrm>
+            <a:off x="457200" y="1280160"/>
+            <a:ext cx="8229600" cy="4937760"/>
+          </a:xfrm>
+          <a:prstGeom prst="rect">
+            <a:avLst/>
+          </a:prstGeom>
+          <a:noFill/>
+        </p:spPr>
+        <p:txBody>
+          <a:bodyPr wrap="square">
+            <a:spAutoFit/>
+          </a:bodyPr>
+          <a:lstStyle/>
+          <a:p>
+            <a:pPr>
+              <a:spcAft>
+                <a:spcPts val="600"/>
+              </a:spcAft>
+            </a:pPr>
+            <a:r>
+              <a:rPr sz="1500">
+                <a:solidFill>
+                  <a:srgbClr val="22282E"/>
+                </a:solidFill>
+              </a:rPr>
+              <a:t>•  ❓ ¿La tríada CIA está desactualizada? No, sigue siendo el marco base. Se ha extendido con autenticidad, no repudio y trazabilidad (modelos como el Parkerian Hexad), pero CIA continúa siendo el punto…</a:t>
+            </a:r>
+          </a:p>
+          <a:p>
+            <a:pPr>
+              <a:spcAft>
+                <a:spcPts val="600"/>
+              </a:spcAft>
+            </a:pPr>
+            <a:r>
+              <a:rPr sz="1500">
+                <a:solidFill>
+                  <a:srgbClr val="22282E"/>
+                </a:solidFill>
+              </a:rPr>
+              <a:t>•  ❓ ¿AAA es lo mismo que MFA? No. AAA es el modelo completo de gobierno del acceso (autenticación, autorización, accounting). MFA es solo una forma de reforzar la primera A combinando varios factores…</a:t>
+            </a:r>
+          </a:p>
+          <a:p>
+            <a:pPr>
+              <a:spcAft>
+                <a:spcPts val="600"/>
+              </a:spcAft>
+            </a:pPr>
+            <a:r>
+              <a:rPr sz="1500">
+                <a:solidFill>
+                  <a:srgbClr val="22282E"/>
+                </a:solidFill>
+              </a:rPr>
+              <a:t>•  ❓ ¿Reducir la superficie de ataque no limita la funcionalidad? A veces sí, y ahí está el equilibrio: se desactiva lo que no se usa y se conserva lo necesario. Un servicio apagado no tiene…</a:t>
+            </a:r>
+          </a:p>
+          <a:p>
+            <a:pPr>
+              <a:spcAft>
+                <a:spcPts val="600"/>
+              </a:spcAft>
+            </a:pPr>
+            <a:r>
+              <a:rPr sz="1500">
+                <a:solidFill>
+                  <a:srgbClr val="22282E"/>
+                </a:solidFill>
+              </a:rPr>
+              <a:t>•  ❓ ¿Zero trust reemplaza la defensa en profundidad? No, la complementa: zero trust elimina la confianza implícita por ubicación de red, pero sigue apilando controles en capas y añade verificación…</a:t>
+            </a:r>
+          </a:p>
+          <a:p>
+            <a:pPr>
+              <a:spcAft>
+                <a:spcPts val="600"/>
+              </a:spcAft>
+            </a:pPr>
+            <a:r>
+              <a:rPr sz="1500">
+                <a:solidFill>
+                  <a:srgbClr val="22282E"/>
+                </a:solidFill>
+              </a:rPr>
+              <a:t>•  ❓ ¿Por dónde empieza un atacante real, por la tecnología o por las personas? Con frecuencia por las personas: el phishing y la ingeniería social explotan la capa humana, que suele ser la más barata…</a:t>
+            </a:r>
+          </a:p>
+        </p:txBody>
+      </p:sp>
+    </p:spTree>
+  </p:cSld>
+  <p:clrMapOvr>
+    <a:masterClrMapping/>
+  </p:clrMapOvr>
+</p:sld>
+</file>
+
+<file path=ppt/slides/slide14.xml><?xml version="1.0" encoding="utf-8"?>
+<p:sld xmlns:a="http://schemas.openxmlformats.org/drawingml/2006/main" xmlns:p="http://schemas.openxmlformats.org/presentationml/2006/main" xmlns:r="http://schemas.openxmlformats.org/officeDocument/2006/relationships">
+  <p:cSld>
+    <p:spTree>
+      <p:nvGrpSpPr>
+        <p:cNvPr id="1" name=""/>
+        <p:cNvGrpSpPr/>
+        <p:nvPr/>
+      </p:nvGrpSpPr>
+      <p:grpSpPr/>
+      <p:sp>
+        <p:nvSpPr>
+          <p:cNvPr id="2" name="TextBox 1"/>
+          <p:cNvSpPr txBox="1"/>
+          <p:nvPr/>
+        </p:nvSpPr>
+        <p:spPr>
+          <a:xfrm>
+            <a:off x="457200" y="320040"/>
+            <a:ext cx="8229600" cy="822960"/>
+          </a:xfrm>
+          <a:prstGeom prst="rect">
+            <a:avLst/>
+          </a:prstGeom>
+          <a:noFill/>
+        </p:spPr>
+        <p:txBody>
+          <a:bodyPr wrap="square">
+            <a:spAutoFit/>
+          </a:bodyPr>
+          <a:lstStyle/>
+          <a:p>
+            <a:r>
+              <a:rPr sz="2600" b="1">
+                <a:solidFill>
+                  <a:srgbClr val="0B3D2E"/>
+                </a:solidFill>
+              </a:rPr>
+              <a:t>🔗 Referencias</a:t>
+            </a:r>
+          </a:p>
+        </p:txBody>
+      </p:sp>
+      <p:sp>
+        <p:nvSpPr>
+          <p:cNvPr id="3" name="TextBox 2"/>
+          <p:cNvSpPr txBox="1"/>
+          <p:nvPr/>
+        </p:nvSpPr>
+        <p:spPr>
+          <a:xfrm>
+            <a:off x="457200" y="1280160"/>
+            <a:ext cx="8229600" cy="4937760"/>
+          </a:xfrm>
+          <a:prstGeom prst="rect">
+            <a:avLst/>
+          </a:prstGeom>
+          <a:noFill/>
+        </p:spPr>
+        <p:txBody>
+          <a:bodyPr wrap="square">
+            <a:spAutoFit/>
+          </a:bodyPr>
+          <a:lstStyle/>
+          <a:p>
+            <a:pPr>
+              <a:spcAft>
+                <a:spcPts val="600"/>
+              </a:spcAft>
+            </a:pPr>
+            <a:r>
+              <a:rPr sz="1500">
+                <a:solidFill>
+                  <a:srgbClr val="22282E"/>
+                </a:solidFill>
+              </a:rPr>
               <a:t>•  NIST SP 800-12 Rev. 1, An Introduction to Information Security — &lt;https://csrc.nist.gov/pubs/sp/800/12/r1/final&gt;</a:t>
             </a:r>
           </a:p>
@@ -3564,11 +3881,176 @@
                   <a:srgbClr val="22282E"/>
                 </a:solidFill>
               </a:rPr>
+              <a:t>•  NIST Glossary (CSRC) — &lt;https://csrc.nist.gov/glossary&gt;</a:t>
+            </a:r>
+          </a:p>
+          <a:p>
+            <a:pPr>
+              <a:spcAft>
+                <a:spcPts val="600"/>
+              </a:spcAft>
+            </a:pPr>
+            <a:r>
+              <a:rPr sz="1500">
+                <a:solidFill>
+                  <a:srgbClr val="22282E"/>
+                </a:solidFill>
+              </a:rPr>
               <a:t>•  OWASP, Attack Surface Analysis Cheat Sheet — &lt;https://cheatsheetseries.owasp.org/&gt;</a:t>
             </a:r>
           </a:p>
         </p:txBody>
       </p:sp>
+    </p:spTree>
+  </p:cSld>
+  <p:clrMapOvr>
+    <a:masterClrMapping/>
+  </p:clrMapOvr>
+</p:sld>
+</file>
+
+<file path=ppt/slides/slide15.xml><?xml version="1.0" encoding="utf-8"?>
+<p:sld xmlns:a="http://schemas.openxmlformats.org/drawingml/2006/main" xmlns:p="http://schemas.openxmlformats.org/presentationml/2006/main" xmlns:r="http://schemas.openxmlformats.org/officeDocument/2006/relationships">
+  <p:cSld>
+    <p:spTree>
+      <p:nvGrpSpPr>
+        <p:cNvPr id="1" name=""/>
+        <p:cNvGrpSpPr/>
+        <p:nvPr/>
+      </p:nvGrpSpPr>
+      <p:grpSpPr/>
+      <p:sp>
+        <p:nvSpPr>
+          <p:cNvPr id="2" name="TextBox 1"/>
+          <p:cNvSpPr txBox="1"/>
+          <p:nvPr/>
+        </p:nvSpPr>
+        <p:spPr>
+          <a:xfrm>
+            <a:off x="457200" y="274320"/>
+            <a:ext cx="8229600" cy="640080"/>
+          </a:xfrm>
+          <a:prstGeom prst="rect">
+            <a:avLst/>
+          </a:prstGeom>
+          <a:noFill/>
+        </p:spPr>
+        <p:txBody>
+          <a:bodyPr wrap="square">
+            <a:spAutoFit/>
+          </a:bodyPr>
+          <a:lstStyle/>
+          <a:p>
+            <a:r>
+              <a:rPr sz="2200" b="1">
+                <a:solidFill>
+                  <a:srgbClr val="0B3D2E"/>
+                </a:solidFill>
+              </a:rPr>
+              <a:t>Diagrama 1</a:t>
+            </a:r>
+          </a:p>
+        </p:txBody>
+      </p:sp>
+      <p:pic>
+        <p:nvPicPr>
+          <p:cNvPr id="3" name="Picture 2" descr="4962b7959108f129.png"/>
+          <p:cNvPicPr>
+            <a:picLocks noChangeAspect="1"/>
+          </p:cNvPicPr>
+          <p:nvPr/>
+        </p:nvPicPr>
+        <p:blipFill>
+          <a:blip r:embed="rId2"/>
+          <a:stretch>
+            <a:fillRect/>
+          </a:stretch>
+        </p:blipFill>
+        <p:spPr>
+          <a:xfrm>
+            <a:off x="457200" y="3159252"/>
+            <a:ext cx="8229600" cy="1179576"/>
+          </a:xfrm>
+          <a:prstGeom prst="rect">
+            <a:avLst/>
+          </a:prstGeom>
+        </p:spPr>
+      </p:pic>
+    </p:spTree>
+  </p:cSld>
+  <p:clrMapOvr>
+    <a:masterClrMapping/>
+  </p:clrMapOvr>
+</p:sld>
+</file>
+
+<file path=ppt/slides/slide16.xml><?xml version="1.0" encoding="utf-8"?>
+<p:sld xmlns:a="http://schemas.openxmlformats.org/drawingml/2006/main" xmlns:p="http://schemas.openxmlformats.org/presentationml/2006/main" xmlns:r="http://schemas.openxmlformats.org/officeDocument/2006/relationships">
+  <p:cSld>
+    <p:spTree>
+      <p:nvGrpSpPr>
+        <p:cNvPr id="1" name=""/>
+        <p:cNvGrpSpPr/>
+        <p:nvPr/>
+      </p:nvGrpSpPr>
+      <p:grpSpPr/>
+      <p:sp>
+        <p:nvSpPr>
+          <p:cNvPr id="2" name="TextBox 1"/>
+          <p:cNvSpPr txBox="1"/>
+          <p:nvPr/>
+        </p:nvSpPr>
+        <p:spPr>
+          <a:xfrm>
+            <a:off x="457200" y="274320"/>
+            <a:ext cx="8229600" cy="640080"/>
+          </a:xfrm>
+          <a:prstGeom prst="rect">
+            <a:avLst/>
+          </a:prstGeom>
+          <a:noFill/>
+        </p:spPr>
+        <p:txBody>
+          <a:bodyPr wrap="square">
+            <a:spAutoFit/>
+          </a:bodyPr>
+          <a:lstStyle/>
+          <a:p>
+            <a:r>
+              <a:rPr sz="2200" b="1">
+                <a:solidFill>
+                  <a:srgbClr val="0B3D2E"/>
+                </a:solidFill>
+              </a:rPr>
+              <a:t>Diagrama 2</a:t>
+            </a:r>
+          </a:p>
+        </p:txBody>
+      </p:sp>
+      <p:pic>
+        <p:nvPicPr>
+          <p:cNvPr id="3" name="Picture 2" descr="812d3e383b4e1c89.png"/>
+          <p:cNvPicPr>
+            <a:picLocks noChangeAspect="1"/>
+          </p:cNvPicPr>
+          <p:nvPr/>
+        </p:nvPicPr>
+        <p:blipFill>
+          <a:blip r:embed="rId2"/>
+          <a:stretch>
+            <a:fillRect/>
+          </a:stretch>
+        </p:blipFill>
+        <p:spPr>
+          <a:xfrm>
+            <a:off x="3949648" y="1097280"/>
+            <a:ext cx="1244703" cy="5303519"/>
+          </a:xfrm>
+          <a:prstGeom prst="rect">
+            <a:avLst/>
+          </a:prstGeom>
+        </p:spPr>
+      </p:pic>
     </p:spTree>
   </p:cSld>
   <p:clrMapOvr>
@@ -3653,7 +4135,7 @@
                   <a:srgbClr val="22282E"/>
                 </a:solidFill>
               </a:rPr>
-              <a:t>•  Construir el vocabulario y los modelos mentales sobre los que descansa todo el programa. Al terminar sabrás qué protege realmente la ciberseguridad (no "los hackers malos", sino propiedades concretas de la información), cómo se controla el acceso a los sistemas, qué es la superficie de ataque de un activo y por qué ninguna defensa aislada es suficiente.</a:t>
+              <a:t>•  Construir el vocabulario y los modelos mentales sobre los que descansa todo el programa. La ciberseguridad no consiste en "detener a los hackers malos": consiste en preservar propiedades concretas y…</a:t>
             </a:r>
           </a:p>
         </p:txBody>
@@ -3802,7 +4284,7 @@
                   <a:srgbClr val="22282E"/>
                 </a:solidFill>
               </a:rPr>
-              <a:t>•  Explicar el principio de defensa en profundidad con capas concretas.</a:t>
+              <a:t>•  Explicar el principio de defensa en profundidad con capas concretas y su lógica de contención.</a:t>
             </a:r>
           </a:p>
           <a:p>
@@ -3818,6 +4300,21 @@
                 </a:solidFill>
               </a:rPr>
               <a:t>•  Relacionar cada concepto con controles reales (cifrado, MFA, logs, segmentación).</a:t>
+            </a:r>
+          </a:p>
+          <a:p>
+            <a:pPr>
+              <a:spcAft>
+                <a:spcPts val="600"/>
+              </a:spcAft>
+            </a:pPr>
+            <a:r>
+              <a:rPr sz="1500">
+                <a:solidFill>
+                  <a:srgbClr val="22282E"/>
+                </a:solidFill>
+              </a:rPr>
+              <a:t>•  Diferenciar con precisión amenaza, vulnerabilidad y riesgo, y situar el modelo zero trust frente al perímetro clásico.</a:t>
             </a:r>
           </a:p>
         </p:txBody>
@@ -4047,7 +4544,7 @@
                   <a:srgbClr val="0B3D2E"/>
                 </a:solidFill>
               </a:rPr>
-              <a:t>📖 Definiciones y características</a:t>
+              <a:t>🧠 Explicación en profundidad</a:t>
             </a:r>
           </a:p>
         </p:txBody>
@@ -4085,97 +4582,97 @@
                   <a:srgbClr val="22282E"/>
                 </a:solidFill>
               </a:rPr>
-              <a:t>•  Confidencialidad: garantía de que la información solo es accesible a quien está autorizado. Característica clave: se rompe con una fuga/disclosure; se protege con cifrado y control de acceso.</a:t>
-            </a:r>
-          </a:p>
-          <a:p>
-            <a:pPr>
-              <a:spcAft>
-                <a:spcPts val="600"/>
-              </a:spcAft>
-            </a:pPr>
-            <a:r>
-              <a:rPr sz="1500">
-                <a:solidFill>
-                  <a:srgbClr val="22282E"/>
-                </a:solidFill>
-              </a:rPr>
-              <a:t>•  Integridad: garantía de que los datos no se alteran de forma no autorizada. Se verifica con hashes y firmas; se rompe con manipulación (tampering).</a:t>
-            </a:r>
-          </a:p>
-          <a:p>
-            <a:pPr>
-              <a:spcAft>
-                <a:spcPts val="600"/>
-              </a:spcAft>
-            </a:pPr>
-            <a:r>
-              <a:rPr sz="1500">
-                <a:solidFill>
-                  <a:srgbClr val="22282E"/>
-                </a:solidFill>
-              </a:rPr>
-              <a:t>•  Disponibilidad: garantía de que el servicio está accesible cuando se necesita. Se ataca con DoS/DDoS; se protege con redundancia y capacidad.</a:t>
-            </a:r>
-          </a:p>
-          <a:p>
-            <a:pPr>
-              <a:spcAft>
-                <a:spcPts val="600"/>
-              </a:spcAft>
-            </a:pPr>
-            <a:r>
-              <a:rPr sz="1500">
-                <a:solidFill>
-                  <a:srgbClr val="22282E"/>
-                </a:solidFill>
-              </a:rPr>
-              <a:t>•  Autenticación: probar que eres quien dices ser (algo que sabes/tienes/eres). Sin ella no hay identidad fiable.</a:t>
-            </a:r>
-          </a:p>
-          <a:p>
-            <a:pPr>
-              <a:spcAft>
-                <a:spcPts val="600"/>
-              </a:spcAft>
-            </a:pPr>
-            <a:r>
-              <a:rPr sz="1500">
-                <a:solidFill>
-                  <a:srgbClr val="22282E"/>
-                </a:solidFill>
-              </a:rPr>
-              <a:t>•  Autorización: decidir qué puede hacer una identidad ya autenticada. Se implementa con RBAC/ABAC.</a:t>
-            </a:r>
-          </a:p>
-          <a:p>
-            <a:pPr>
-              <a:spcAft>
-                <a:spcPts val="600"/>
-              </a:spcAft>
-            </a:pPr>
-            <a:r>
-              <a:rPr sz="1500">
-                <a:solidFill>
-                  <a:srgbClr val="22282E"/>
-                </a:solidFill>
-              </a:rPr>
-              <a:t>•  Accounting/Auditoría: registrar quién hizo qué y cuándo. Habilita la trazabilidad y el forense.</a:t>
-            </a:r>
-          </a:p>
-          <a:p>
-            <a:pPr>
-              <a:spcAft>
-                <a:spcPts val="600"/>
-              </a:spcAft>
-            </a:pPr>
-            <a:r>
-              <a:rPr sz="1500">
-                <a:solidFill>
-                  <a:srgbClr val="22282E"/>
-                </a:solidFill>
-              </a:rPr>
-              <a:t>•  Superficie de ataque: suma de todos los puntos donde un atacante puede intentar entrar (puertos, APIs, formularios, personas). Menos superficie = menos riesgo.</a:t>
+              <a:t>•  Cuando un profesional evalúa un sistema no se pregunta "¿es seguro?" —una pregunta sin respuesta objetiva— sino "¿qué propiedades de esta información necesito preservar y contra qué?". La respuesta…</a:t>
+            </a:r>
+          </a:p>
+          <a:p>
+            <a:pPr>
+              <a:spcAft>
+                <a:spcPts val="600"/>
+              </a:spcAft>
+            </a:pPr>
+            <a:r>
+              <a:rPr sz="1500">
+                <a:solidFill>
+                  <a:srgbClr val="22282E"/>
+                </a:solidFill>
+              </a:rPr>
+              <a:t>•  Lo valioso de la tríada es que las tres propiedades están en tensión: subir una suele bajar otra. Cifrarlo todo refuerza la confidencialidad pero, si pierdes la clave, destruyes tu propia…</a:t>
+            </a:r>
+          </a:p>
+          <a:p>
+            <a:pPr>
+              <a:spcAft>
+                <a:spcPts val="600"/>
+              </a:spcAft>
+            </a:pPr>
+            <a:r>
+              <a:rPr sz="1500">
+                <a:solidFill>
+                  <a:srgbClr val="22282E"/>
+                </a:solidFill>
+              </a:rPr>
+              <a:t>•  La tríada es el punto de partida, no el final. Modelos posteriores como el Parkerian Hexad añaden propiedades que en la práctica moderna son imprescindibles. La autenticidad garantiza que un mensaje…</a:t>
+            </a:r>
+          </a:p>
+          <a:p>
+            <a:pPr>
+              <a:spcAft>
+                <a:spcPts val="600"/>
+              </a:spcAft>
+            </a:pPr>
+            <a:r>
+              <a:rPr sz="1500">
+                <a:solidFill>
+                  <a:srgbClr val="22282E"/>
+                </a:solidFill>
+              </a:rPr>
+              <a:t>•  Si CIA dice qué proteger, el modelo AAA dice cómo se gobierna el acceso. Sus tres A ocurren en orden y no deben confundirse. La autenticación responde a "¿quién eres?" y se basa en factores: algo que…</a:t>
+            </a:r>
+          </a:p>
+          <a:p>
+            <a:pPr>
+              <a:spcAft>
+                <a:spcPts val="600"/>
+              </a:spcAft>
+            </a:pPr>
+            <a:r>
+              <a:rPr sz="1500">
+                <a:solidFill>
+                  <a:srgbClr val="22282E"/>
+                </a:solidFill>
+              </a:rPr>
+              <a:t>•  La superficie de ataque de un sistema es la suma de todos los puntos por los que un adversario podría intentar entrar o influir: puertos y servicios de red abiertos, APIs y formularios web…</a:t>
+            </a:r>
+          </a:p>
+          <a:p>
+            <a:pPr>
+              <a:spcAft>
+                <a:spcPts val="600"/>
+              </a:spcAft>
+            </a:pPr>
+            <a:r>
+              <a:rPr sz="1500">
+                <a:solidFill>
+                  <a:srgbClr val="22282E"/>
+                </a:solidFill>
+              </a:rPr>
+              <a:t>•  Confundir estos tres términos lleva a decisiones malas. Una amenaza es un agente o evento que podría causar daño (un grupo de ransomware, un empleado descontento, un incendio). Una vulnerabilidad es…</a:t>
+            </a:r>
+          </a:p>
+          <a:p>
+            <a:pPr>
+              <a:spcAft>
+                <a:spcPts val="600"/>
+              </a:spcAft>
+            </a:pPr>
+            <a:r>
+              <a:rPr sz="1500">
+                <a:solidFill>
+                  <a:srgbClr val="22282E"/>
+                </a:solidFill>
+              </a:rPr>
+              <a:t>•  Ninguna capa de seguridad es infalible, así que la arquitectura correcta parte de asumir que alguna caerá y coloca controles redundantes en profundidad, de modo que romper una barrera todavía deje al…</a:t>
             </a:r>
           </a:p>
         </p:txBody>
@@ -4226,7 +4723,7 @@
                   <a:srgbClr val="0B3D2E"/>
                 </a:solidFill>
               </a:rPr>
-              <a:t>🧰 Herramientas y preparación</a:t>
+              <a:t>📖 Definiciones y características</a:t>
             </a:r>
           </a:p>
         </p:txBody>
@@ -4264,7 +4761,97 @@
                   <a:srgbClr val="22282E"/>
                 </a:solidFill>
               </a:rPr>
-              <a:t>•  Esta clase es conceptual, pero conviene tener papel/pizarra digital para diagramar. Instala draw.io (o usa &lt;https://app.diagrams.net&gt;) para dibujar diagramas de flujo de acceso y capas de defensa. Ten a mano el navegador para consultar el NIST CSF 2.0 y el glosario NIST 800-160. No hace falta laboratorio ofensivo todavía; se prepara en la Clase 004.</a:t>
+              <a:t>•  Confidencialidad: garantía de que la información solo es accesible a quien está autorizado. Se rompe con una fuga o disclosure y se protege con cifrado y control de acceso. Es la propiedad más…</a:t>
+            </a:r>
+          </a:p>
+          <a:p>
+            <a:pPr>
+              <a:spcAft>
+                <a:spcPts val="600"/>
+              </a:spcAft>
+            </a:pPr>
+            <a:r>
+              <a:rPr sz="1500">
+                <a:solidFill>
+                  <a:srgbClr val="22282E"/>
+                </a:solidFill>
+              </a:rPr>
+              <a:t>•  Integridad: garantía de que los datos no se alteran de forma no autorizada ni indetectable. Se verifica con funciones hash y firmas digitales, y se rompe con manipulación (tampering). Sin integridad…</a:t>
+            </a:r>
+          </a:p>
+          <a:p>
+            <a:pPr>
+              <a:spcAft>
+                <a:spcPts val="600"/>
+              </a:spcAft>
+            </a:pPr>
+            <a:r>
+              <a:rPr sz="1500">
+                <a:solidFill>
+                  <a:srgbClr val="22282E"/>
+                </a:solidFill>
+              </a:rPr>
+              <a:t>•  Disponibilidad: garantía de que el servicio está accesible cuando se necesita. Se ataca con DoS/DDoS y se protege con redundancia, capacidad de reserva y recuperación ante desastres. Es una propiedad…</a:t>
+            </a:r>
+          </a:p>
+          <a:p>
+            <a:pPr>
+              <a:spcAft>
+                <a:spcPts val="600"/>
+              </a:spcAft>
+            </a:pPr>
+            <a:r>
+              <a:rPr sz="1500">
+                <a:solidFill>
+                  <a:srgbClr val="22282E"/>
+                </a:solidFill>
+              </a:rPr>
+              <a:t>•  Autenticación: proceso de probar que una identidad es quien dice ser mediante factores (algo que sabes, tienes o eres). Sin autenticación fiable, todo lo demás carece de base porque no hay a quién…</a:t>
+            </a:r>
+          </a:p>
+          <a:p>
+            <a:pPr>
+              <a:spcAft>
+                <a:spcPts val="600"/>
+              </a:spcAft>
+            </a:pPr>
+            <a:r>
+              <a:rPr sz="1500">
+                <a:solidFill>
+                  <a:srgbClr val="22282E"/>
+                </a:solidFill>
+              </a:rPr>
+              <a:t>•  Autorización: decisión sobre qué puede hacer una identidad ya autenticada. Se implementa con modelos como RBAC o ABAC y depende del mínimo privilegio para limitar el daño de una cuenta comprometida.</a:t>
+            </a:r>
+          </a:p>
+          <a:p>
+            <a:pPr>
+              <a:spcAft>
+                <a:spcPts val="600"/>
+              </a:spcAft>
+            </a:pPr>
+            <a:r>
+              <a:rPr sz="1500">
+                <a:solidFill>
+                  <a:srgbClr val="22282E"/>
+                </a:solidFill>
+              </a:rPr>
+              <a:t>•  Accounting / Auditoría: registro de quién hizo qué y cuándo. Habilita la trazabilidad, la detección de abusos y la investigación forense; sin logs adecuados, un incidente es invisible o…</a:t>
+            </a:r>
+          </a:p>
+          <a:p>
+            <a:pPr>
+              <a:spcAft>
+                <a:spcPts val="600"/>
+              </a:spcAft>
+            </a:pPr>
+            <a:r>
+              <a:rPr sz="1500">
+                <a:solidFill>
+                  <a:srgbClr val="22282E"/>
+                </a:solidFill>
+              </a:rPr>
+              <a:t>•  Superficie de ataque: suma de todos los puntos por los que un atacante puede intentar entrar (puertos, APIs, formularios, dependencias, personas). Reducirla desactivando lo innecesario es la forma…</a:t>
             </a:r>
           </a:p>
         </p:txBody>
@@ -4315,7 +4902,7 @@
                   <a:srgbClr val="0B3D2E"/>
                 </a:solidFill>
               </a:rPr>
-              <a:t>🧪 Laboratorio guiado (ejercicio aplicado)</a:t>
+              <a:t>📔 Glosario</a:t>
             </a:r>
           </a:p>
         </p:txBody>
@@ -4353,97 +4940,97 @@
                   <a:srgbClr val="22282E"/>
                 </a:solidFill>
               </a:rPr>
-              <a:t>•  Elige un sistema real que conozcas (tu correo personal, un servidor web, un cajero). Anótalo.</a:t>
-            </a:r>
-          </a:p>
-          <a:p>
-            <a:pPr>
-              <a:spcAft>
-                <a:spcPts val="600"/>
-              </a:spcAft>
-            </a:pPr>
-            <a:r>
-              <a:rPr sz="1500">
-                <a:solidFill>
-                  <a:srgbClr val="22282E"/>
-                </a:solidFill>
-              </a:rPr>
-              <a:t>•  CIA por activo: para ese sistema, escribe un ejemplo concreto de ataque que rompa (a) confidencialidad, (b) integridad, (c) disponibilidad.</a:t>
-            </a:r>
-          </a:p>
-          <a:p>
-            <a:pPr>
-              <a:spcAft>
-                <a:spcPts val="600"/>
-              </a:spcAft>
-            </a:pPr>
-            <a:r>
-              <a:rPr sz="1500">
-                <a:solidFill>
-                  <a:srgbClr val="22282E"/>
-                </a:solidFill>
-              </a:rPr>
-              <a:t>•  Flujo AAA: dibuja en draw.io el recorrido de un login: identidad → autenticación (¿factor?) → autorización (¿qué permisos?) → accounting (¿qué se registra?).</a:t>
-            </a:r>
-          </a:p>
-          <a:p>
-            <a:pPr>
-              <a:spcAft>
-                <a:spcPts val="600"/>
-              </a:spcAft>
-            </a:pPr>
-            <a:r>
-              <a:rPr sz="1500">
-                <a:solidFill>
-                  <a:srgbClr val="22282E"/>
-                </a:solidFill>
-              </a:rPr>
-              <a:t>•  Mapa de superficie de ataque: lista todos los puntos de entrada del sistema. Para un servidor web típico: puertos 80/443, SSH 22, panel de admin, formularios, dependencias, y el propio administrador (ingeniería social).</a:t>
-            </a:r>
-          </a:p>
-          <a:p>
-            <a:pPr>
-              <a:spcAft>
-                <a:spcPts val="600"/>
-              </a:spcAft>
-            </a:pPr>
-            <a:r>
-              <a:rPr sz="1500">
-                <a:solidFill>
-                  <a:srgbClr val="22282E"/>
-                </a:solidFill>
-              </a:rPr>
-              <a:t>•  Reducción: junto a cada punto, escribe una medida de hardening (cerrar puerto, MFA, WAF, parcheo, formación).</a:t>
-            </a:r>
-          </a:p>
-          <a:p>
-            <a:pPr>
-              <a:spcAft>
-                <a:spcPts val="600"/>
-              </a:spcAft>
-            </a:pPr>
-            <a:r>
-              <a:rPr sz="1500">
-                <a:solidFill>
-                  <a:srgbClr val="22282E"/>
-                </a:solidFill>
-              </a:rPr>
-              <a:t>•  Capas de defensa: reorganiza tus controles en capas: perímetro (firewall) → red (segmentación) → host (EDR, parches) → aplicación (validación) → datos (cifrado) → humano (concienciación).</a:t>
-            </a:r>
-          </a:p>
-          <a:p>
-            <a:pPr>
-              <a:spcAft>
-                <a:spcPts val="600"/>
-              </a:spcAft>
-            </a:pPr>
-            <a:r>
-              <a:rPr sz="1500">
-                <a:solidFill>
-                  <a:srgbClr val="22282E"/>
-                </a:solidFill>
-              </a:rPr>
-              <a:t>•  Contrasta: si cae una capa, ¿qué otra frena al atacante? Esa es la esencia de la defensa en profundidad.</a:t>
+              <a:t>•  Término — Definición concisa</a:t>
+            </a:r>
+          </a:p>
+          <a:p>
+            <a:pPr>
+              <a:spcAft>
+                <a:spcPts val="600"/>
+              </a:spcAft>
+            </a:pPr>
+            <a:r>
+              <a:rPr sz="1500">
+                <a:solidFill>
+                  <a:srgbClr val="22282E"/>
+                </a:solidFill>
+              </a:rPr>
+              <a:t>•  CIA — Confidencialidad, Integridad y Disponibilidad; las tres propiedades base a proteger</a:t>
+            </a:r>
+          </a:p>
+          <a:p>
+            <a:pPr>
+              <a:spcAft>
+                <a:spcPts val="600"/>
+              </a:spcAft>
+            </a:pPr>
+            <a:r>
+              <a:rPr sz="1500">
+                <a:solidFill>
+                  <a:srgbClr val="22282E"/>
+                </a:solidFill>
+              </a:rPr>
+              <a:t>•  AAA — Autenticación, Autorización y Accounting; el modelo de gobierno del acceso</a:t>
+            </a:r>
+          </a:p>
+          <a:p>
+            <a:pPr>
+              <a:spcAft>
+                <a:spcPts val="600"/>
+              </a:spcAft>
+            </a:pPr>
+            <a:r>
+              <a:rPr sz="1500">
+                <a:solidFill>
+                  <a:srgbClr val="22282E"/>
+                </a:solidFill>
+              </a:rPr>
+              <a:t>•  MFA — Autenticación multifactor: combinar dos o más factores independientes</a:t>
+            </a:r>
+          </a:p>
+          <a:p>
+            <a:pPr>
+              <a:spcAft>
+                <a:spcPts val="600"/>
+              </a:spcAft>
+            </a:pPr>
+            <a:r>
+              <a:rPr sz="1500">
+                <a:solidFill>
+                  <a:srgbClr val="22282E"/>
+                </a:solidFill>
+              </a:rPr>
+              <a:t>•  RBAC — Control de acceso basado en roles</a:t>
+            </a:r>
+          </a:p>
+          <a:p>
+            <a:pPr>
+              <a:spcAft>
+                <a:spcPts val="600"/>
+              </a:spcAft>
+            </a:pPr>
+            <a:r>
+              <a:rPr sz="1500">
+                <a:solidFill>
+                  <a:srgbClr val="22282E"/>
+                </a:solidFill>
+              </a:rPr>
+              <a:t>•  ABAC — Control de acceso basado en atributos</a:t>
+            </a:r>
+          </a:p>
+          <a:p>
+            <a:pPr>
+              <a:spcAft>
+                <a:spcPts val="600"/>
+              </a:spcAft>
+            </a:pPr>
+            <a:r>
+              <a:rPr sz="1500">
+                <a:solidFill>
+                  <a:srgbClr val="22282E"/>
+                </a:solidFill>
+              </a:rPr>
+              <a:t>•  Hardening — Reducir la superficie de ataque desactivando y reforzando componentes</a:t>
             </a:r>
           </a:p>
         </p:txBody>
@@ -4494,7 +5081,7 @@
                   <a:srgbClr val="0B3D2E"/>
                 </a:solidFill>
               </a:rPr>
-              <a:t>✍️ Ejercicios</a:t>
+              <a:t>🧰 Herramientas y preparación</a:t>
             </a:r>
           </a:p>
         </p:txBody>
@@ -4532,82 +5119,7 @@
                   <a:srgbClr val="22282E"/>
                 </a:solidFill>
               </a:rPr>
-              <a:t>•  Clasifica estos incidentes según qué propiedad CIA violan: ransomware, defacement de una web, robo de base de datos, ataque de amplificación DNS.</a:t>
-            </a:r>
-          </a:p>
-          <a:p>
-            <a:pPr>
-              <a:spcAft>
-                <a:spcPts val="600"/>
-              </a:spcAft>
-            </a:pPr>
-            <a:r>
-              <a:rPr sz="1500">
-                <a:solidFill>
-                  <a:srgbClr val="22282E"/>
-                </a:solidFill>
-              </a:rPr>
-              <a:t>•  Explica con un ejemplo la diferencia entre amenaza, vulnerabilidad y riesgo.</a:t>
-            </a:r>
-          </a:p>
-          <a:p>
-            <a:pPr>
-              <a:spcAft>
-                <a:spcPts val="600"/>
-              </a:spcAft>
-            </a:pPr>
-            <a:r>
-              <a:rPr sz="1500">
-                <a:solidFill>
-                  <a:srgbClr val="22282E"/>
-                </a:solidFill>
-              </a:rPr>
-              <a:t>•  Diseña un esquema AAA para una app bancaria: ¿qué factores de autenticación y qué niveles de autorización usarías?</a:t>
-            </a:r>
-          </a:p>
-          <a:p>
-            <a:pPr>
-              <a:spcAft>
-                <a:spcPts val="600"/>
-              </a:spcAft>
-            </a:pPr>
-            <a:r>
-              <a:rPr sz="1500">
-                <a:solidFill>
-                  <a:srgbClr val="22282E"/>
-                </a:solidFill>
-              </a:rPr>
-              <a:t>•  Toma un dispositivo IoT doméstico y enumera su superficie de ataque completa.</a:t>
-            </a:r>
-          </a:p>
-          <a:p>
-            <a:pPr>
-              <a:spcAft>
-                <a:spcPts val="600"/>
-              </a:spcAft>
-            </a:pPr>
-            <a:r>
-              <a:rPr sz="1500">
-                <a:solidFill>
-                  <a:srgbClr val="22282E"/>
-                </a:solidFill>
-              </a:rPr>
-              <a:t>•  Un servidor tiene un único control: un firewall perimetral. Argumenta por qué es insuficiente y propón tres capas más.</a:t>
-            </a:r>
-          </a:p>
-          <a:p>
-            <a:pPr>
-              <a:spcAft>
-                <a:spcPts val="600"/>
-              </a:spcAft>
-            </a:pPr>
-            <a:r>
-              <a:rPr sz="1500">
-                <a:solidFill>
-                  <a:srgbClr val="22282E"/>
-                </a:solidFill>
-              </a:rPr>
-              <a:t>•  Investiga y resume en 5 líneas qué cambia el modelo zero trust respecto al perímetro clásico.</a:t>
+              <a:t>•  Esta clase es conceptual, pero conviene tener papel o una pizarra digital para diagramar. Instala draw.io o usa &lt;https://app.diagrams.net&gt; para dibujar flujos de acceso AAA y capas de defensa. Ten el…</a:t>
             </a:r>
           </a:p>
         </p:txBody>
@@ -4658,7 +5170,7 @@
                   <a:srgbClr val="0B3D2E"/>
                 </a:solidFill>
               </a:rPr>
-              <a:t>📝 Reto verificable</a:t>
+              <a:t>🧪 Laboratorio guiado</a:t>
             </a:r>
           </a:p>
         </p:txBody>
@@ -4696,22 +5208,97 @@
                   <a:srgbClr val="22282E"/>
                 </a:solidFill>
               </a:rPr>
-              <a:t>•  Redacta una ficha de una página para un activo de tu elección que contenga: (1) su clasificación CIA con justificación, (2) su matriz AAA, (3) su mapa de superficie de ataque con al menos 6 puntos, y (4) un diagrama de defensa en profundidad con 4 capas mínimo.</a:t>
-            </a:r>
-          </a:p>
-          <a:p>
-            <a:pPr>
-              <a:spcAft>
-                <a:spcPts val="600"/>
-              </a:spcAft>
-            </a:pPr>
-            <a:r>
-              <a:rPr sz="1500">
-                <a:solidFill>
-                  <a:srgbClr val="22282E"/>
-                </a:solidFill>
-              </a:rPr>
-              <a:t>•  Criterio de aceptación: la ficha vincula cada punto de la superficie de ataque a al menos un control, y cada control queda asignado a una capa de la defensa en profundidad. Un revisor debe poder señalar qué falla se contiene en qué capa.</a:t>
+              <a:t>•  Elige un sistema real que conozcas (tu correo personal, un servidor web, un cajero automático). Anótalo; será tu activo de referencia.</a:t>
+            </a:r>
+          </a:p>
+          <a:p>
+            <a:pPr>
+              <a:spcAft>
+                <a:spcPts val="600"/>
+              </a:spcAft>
+            </a:pPr>
+            <a:r>
+              <a:rPr sz="1500">
+                <a:solidFill>
+                  <a:srgbClr val="22282E"/>
+                </a:solidFill>
+              </a:rPr>
+              <a:t>•  CIA por activo: para ese sistema, escribe un ejemplo concreto de ataque que rompa (a) confidencialidad, (b) integridad y (c) disponibilidad. Justifica por qué cada uno afecta a esa propiedad y no a…</a:t>
+            </a:r>
+          </a:p>
+          <a:p>
+            <a:pPr>
+              <a:spcAft>
+                <a:spcPts val="600"/>
+              </a:spcAft>
+            </a:pPr>
+            <a:r>
+              <a:rPr sz="1500">
+                <a:solidFill>
+                  <a:srgbClr val="22282E"/>
+                </a:solidFill>
+              </a:rPr>
+              <a:t>•  Prioridad CIA: ordena las tres propiedades para tu activo según su valor real y explica el criterio. No hay respuesta única; hay respuesta justificada.</a:t>
+            </a:r>
+          </a:p>
+          <a:p>
+            <a:pPr>
+              <a:spcAft>
+                <a:spcPts val="600"/>
+              </a:spcAft>
+            </a:pPr>
+            <a:r>
+              <a:rPr sz="1500">
+                <a:solidFill>
+                  <a:srgbClr val="22282E"/>
+                </a:solidFill>
+              </a:rPr>
+              <a:t>•  Flujo AAA: dibuja en draw.io el recorrido de un login: identidad → autenticación (¿qué factores?) → autorización (¿qué permisos concede?) → accounting (¿qué eventos registra?).</a:t>
+            </a:r>
+          </a:p>
+          <a:p>
+            <a:pPr>
+              <a:spcAft>
+                <a:spcPts val="600"/>
+              </a:spcAft>
+            </a:pPr>
+            <a:r>
+              <a:rPr sz="1500">
+                <a:solidFill>
+                  <a:srgbClr val="22282E"/>
+                </a:solidFill>
+              </a:rPr>
+              <a:t>•  Mapa de superficie de ataque: lista todos los puntos de entrada del sistema. Para un servidor web típico: puertos 80/443, SSH en el 22, panel de administración, formularios, dependencias de terceros…</a:t>
+            </a:r>
+          </a:p>
+          <a:p>
+            <a:pPr>
+              <a:spcAft>
+                <a:spcPts val="600"/>
+              </a:spcAft>
+            </a:pPr>
+            <a:r>
+              <a:rPr sz="1500">
+                <a:solidFill>
+                  <a:srgbClr val="22282E"/>
+                </a:solidFill>
+              </a:rPr>
+              <a:t>•  Reducción: junto a cada punto, escribe una medida de hardening (cerrar puerto, exigir MFA, poner un WAF, parchear, formar al personal).</a:t>
+            </a:r>
+          </a:p>
+          <a:p>
+            <a:pPr>
+              <a:spcAft>
+                <a:spcPts val="600"/>
+              </a:spcAft>
+            </a:pPr>
+            <a:r>
+              <a:rPr sz="1500">
+                <a:solidFill>
+                  <a:srgbClr val="22282E"/>
+                </a:solidFill>
+              </a:rPr>
+              <a:t>•  Capas de defensa: reorganiza tus controles en capas —perímetro (firewall), red (segmentación), host (EDR, parches), aplicación (validación), datos (cifrado) y humano (concienciación).</a:t>
             </a:r>
           </a:p>
         </p:txBody>
